--- a/과제정의서.pptx
+++ b/과제정의서.pptx
@@ -211,7 +211,7 @@
           <a:p>
             <a:fld id="{CCD26DCF-1716-484D-9C58-882373CAEEA5}" type="datetimeFigureOut">
               <a:rPr lang="ko-KR" altLang="en-US" smtClean="0"/>
-              <a:t>2026. 4. 20.</a:t>
+              <a:t>2026. 5. 29.</a:t>
             </a:fld>
             <a:endParaRPr lang="ko-KR" altLang="en-US"/>
           </a:p>
@@ -1428,7 +1428,7 @@
           <a:p>
             <a:fld id="{8EF495C4-D990-47E5-87EB-7F0830E8B335}" type="datetimeFigureOut">
               <a:rPr lang="ko-KR" altLang="en-US" smtClean="0"/>
-              <a:t>2026. 4. 20.</a:t>
+              <a:t>2026. 5. 29.</a:t>
             </a:fld>
             <a:endParaRPr lang="ko-KR" altLang="en-US"/>
           </a:p>
@@ -1639,7 +1639,7 @@
           <a:p>
             <a:fld id="{8EF495C4-D990-47E5-87EB-7F0830E8B335}" type="datetimeFigureOut">
               <a:rPr lang="ko-KR" altLang="en-US" smtClean="0"/>
-              <a:t>2026. 4. 20.</a:t>
+              <a:t>2026. 5. 29.</a:t>
             </a:fld>
             <a:endParaRPr lang="ko-KR" altLang="en-US"/>
           </a:p>
@@ -1845,7 +1845,7 @@
           <a:p>
             <a:fld id="{8EF495C4-D990-47E5-87EB-7F0830E8B335}" type="datetimeFigureOut">
               <a:rPr lang="ko-KR" altLang="en-US" smtClean="0"/>
-              <a:t>2026. 4. 20.</a:t>
+              <a:t>2026. 5. 29.</a:t>
             </a:fld>
             <a:endParaRPr lang="ko-KR" altLang="en-US"/>
           </a:p>
@@ -2139,7 +2139,7 @@
           <a:p>
             <a:fld id="{8EF495C4-D990-47E5-87EB-7F0830E8B335}" type="datetimeFigureOut">
               <a:rPr lang="ko-KR" altLang="en-US" smtClean="0"/>
-              <a:t>2026. 4. 20.</a:t>
+              <a:t>2026. 5. 29.</a:t>
             </a:fld>
             <a:endParaRPr lang="ko-KR" altLang="en-US"/>
           </a:p>
@@ -2412,7 +2412,7 @@
           <a:p>
             <a:fld id="{8EF495C4-D990-47E5-87EB-7F0830E8B335}" type="datetimeFigureOut">
               <a:rPr lang="ko-KR" altLang="en-US" smtClean="0"/>
-              <a:t>2026. 4. 20.</a:t>
+              <a:t>2026. 5. 29.</a:t>
             </a:fld>
             <a:endParaRPr lang="ko-KR" altLang="en-US"/>
           </a:p>
@@ -2827,7 +2827,7 @@
           <a:p>
             <a:fld id="{8EF495C4-D990-47E5-87EB-7F0830E8B335}" type="datetimeFigureOut">
               <a:rPr lang="ko-KR" altLang="en-US" smtClean="0"/>
-              <a:t>2026. 4. 20.</a:t>
+              <a:t>2026. 5. 29.</a:t>
             </a:fld>
             <a:endParaRPr lang="ko-KR" altLang="en-US"/>
           </a:p>
@@ -2976,7 +2976,7 @@
           <a:p>
             <a:fld id="{8EF495C4-D990-47E5-87EB-7F0830E8B335}" type="datetimeFigureOut">
               <a:rPr lang="ko-KR" altLang="en-US" smtClean="0"/>
-              <a:t>2026. 4. 20.</a:t>
+              <a:t>2026. 5. 29.</a:t>
             </a:fld>
             <a:endParaRPr lang="ko-KR" altLang="en-US"/>
           </a:p>
@@ -3089,7 +3089,7 @@
           <a:p>
             <a:fld id="{8EF495C4-D990-47E5-87EB-7F0830E8B335}" type="datetimeFigureOut">
               <a:rPr lang="ko-KR" altLang="en-US" smtClean="0"/>
-              <a:t>2026. 4. 20.</a:t>
+              <a:t>2026. 5. 29.</a:t>
             </a:fld>
             <a:endParaRPr lang="ko-KR" altLang="en-US"/>
           </a:p>
@@ -3403,7 +3403,7 @@
           <a:p>
             <a:fld id="{8EF495C4-D990-47E5-87EB-7F0830E8B335}" type="datetimeFigureOut">
               <a:rPr lang="ko-KR" altLang="en-US" smtClean="0"/>
-              <a:t>2026. 4. 20.</a:t>
+              <a:t>2026. 5. 29.</a:t>
             </a:fld>
             <a:endParaRPr lang="ko-KR" altLang="en-US"/>
           </a:p>
@@ -3694,7 +3694,7 @@
           <a:p>
             <a:fld id="{8EF495C4-D990-47E5-87EB-7F0830E8B335}" type="datetimeFigureOut">
               <a:rPr lang="ko-KR" altLang="en-US" smtClean="0"/>
-              <a:t>2026. 4. 20.</a:t>
+              <a:t>2026. 5. 29.</a:t>
             </a:fld>
             <a:endParaRPr lang="ko-KR" altLang="en-US"/>
           </a:p>
@@ -3900,7 +3900,7 @@
           <a:p>
             <a:fld id="{8EF495C4-D990-47E5-87EB-7F0830E8B335}" type="datetimeFigureOut">
               <a:rPr lang="ko-KR" altLang="en-US" smtClean="0"/>
-              <a:t>2026. 4. 20.</a:t>
+              <a:t>2026. 5. 29.</a:t>
             </a:fld>
             <a:endParaRPr lang="ko-KR" altLang="en-US"/>
           </a:p>
@@ -4411,17 +4411,18 @@
               <a:t> </a:t>
             </a:r>
             <a:r>
-              <a:rPr lang="ko-KR" altLang="en-US" sz="1100" dirty="0"/>
-              <a:t>전화 및 메신저</a:t>
-            </a:r>
-            <a:r>
-              <a:rPr lang="en-US" altLang="ko-KR" sz="1100" dirty="0"/>
-              <a:t>,</a:t>
-            </a:r>
-            <a:r>
-              <a:rPr lang="ko-KR" altLang="en-US" sz="1100" dirty="0"/>
-              <a:t> 이메일 문의에 수작업 대응</a:t>
-            </a:r>
+              <a:rPr lang="ko-KR" altLang="ko-KR" sz="1100" dirty="0"/>
+              <a:t>직원 문의를 </a:t>
+            </a:r>
+            <a:r>
+              <a:rPr lang="ko-KR" altLang="ko-KR" sz="1100" dirty="0" err="1"/>
+              <a:t>전화·메신저·이메일로</a:t>
+            </a:r>
+            <a:r>
+              <a:rPr lang="ko-KR" altLang="ko-KR" sz="1100" dirty="0"/>
+              <a:t> 접수하여 HR 담당자가 수작업으로 답변</a:t>
+            </a:r>
+            <a:endParaRPr lang="en-US" altLang="ko-KR" sz="1100" dirty="0"/>
           </a:p>
           <a:p>
             <a:endParaRPr lang="ko-KR" altLang="en-US" sz="1100" dirty="0"/>
@@ -4433,68 +4434,53 @@
             </a:r>
           </a:p>
           <a:p>
-            <a:pPr marL="171450" indent="-171450">
-              <a:buFontTx/>
-              <a:buChar char="-"/>
-            </a:pPr>
             <a:r>
               <a:rPr lang="en-US" altLang="ko-KR" sz="1100" dirty="0"/>
-              <a:t>HR </a:t>
+              <a:t>-</a:t>
             </a:r>
             <a:r>
               <a:rPr lang="ko-KR" altLang="en-US" sz="1100" dirty="0"/>
-              <a:t>담당자의 주요 업무 중 하나인 직원 문의 응대에 많은 시간 소요</a:t>
-            </a:r>
-            <a:br>
+              <a:t> </a:t>
+            </a:r>
+            <a:r>
+              <a:rPr lang="ko-KR" altLang="ko-KR" sz="1100" dirty="0"/>
+              <a:t>HR 담당자가 반복적이고 유사한 직원 문의 대응에 많은 시간을 소모</a:t>
+            </a:r>
+          </a:p>
+          <a:p>
+            <a:r>
               <a:rPr lang="en-US" altLang="ko-KR" sz="1100" dirty="0"/>
-            </a:br>
+              <a:t>-</a:t>
+            </a:r>
             <a:r>
               <a:rPr lang="ko-KR" altLang="en-US" sz="1100" dirty="0"/>
-              <a:t>  *</a:t>
-            </a:r>
+              <a:t> </a:t>
+            </a:r>
+            <a:r>
+              <a:rPr lang="ko-KR" altLang="ko-KR" sz="1100" dirty="0"/>
+              <a:t>근태, 출장, 휴가, 복리후생 등 자주 발생하는 문의가 지속적으로 반복</a:t>
+            </a:r>
+          </a:p>
+          <a:p>
             <a:r>
               <a:rPr lang="en-US" altLang="ko-KR" sz="1100" dirty="0"/>
+              <a:t>-</a:t>
+            </a:r>
+            <a:r>
+              <a:rPr lang="ko-KR" altLang="en-US" sz="1100" dirty="0"/>
               <a:t> </a:t>
             </a:r>
             <a:r>
-              <a:rPr lang="ko-KR" altLang="en-US" sz="1100" dirty="0"/>
-              <a:t>특히 근태</a:t>
-            </a:r>
-            <a:r>
-              <a:rPr lang="en-US" altLang="ko-KR" sz="1100" dirty="0"/>
-              <a:t>, </a:t>
-            </a:r>
-            <a:r>
-              <a:rPr lang="ko-KR" altLang="en-US" sz="1100" dirty="0"/>
-              <a:t>출장 등 잦은 문의 중 유사</a:t>
-            </a:r>
-            <a:r>
-              <a:rPr lang="en-US" altLang="ko-KR" sz="1100" dirty="0"/>
-              <a:t>/</a:t>
-            </a:r>
-            <a:r>
-              <a:rPr lang="ko-KR" altLang="en-US" sz="1100" dirty="0"/>
-              <a:t>공통된 질문이 다수 존재</a:t>
-            </a:r>
-            <a:r>
-              <a:rPr lang="en-US" altLang="ko-KR" sz="1100" dirty="0"/>
-              <a:t>(ex. </a:t>
-            </a:r>
-            <a:r>
-              <a:rPr lang="ko-KR" altLang="en-US" sz="1100" dirty="0"/>
-              <a:t>경조사 휴가 기준</a:t>
-            </a:r>
-            <a:r>
-              <a:rPr lang="en-US" altLang="ko-KR" sz="1100" dirty="0"/>
-              <a:t>, </a:t>
-            </a:r>
-            <a:r>
-              <a:rPr lang="ko-KR" altLang="en-US" sz="1100" dirty="0"/>
-              <a:t>출장 이동 시간의 근로시간 산정</a:t>
-            </a:r>
-            <a:r>
-              <a:rPr lang="en-US" altLang="ko-KR" sz="1100" dirty="0"/>
-              <a:t>)</a:t>
+              <a:rPr lang="ko-KR" altLang="ko-KR" sz="1100" dirty="0"/>
+              <a:t>문의 응대로 인해 제도 </a:t>
+            </a:r>
+            <a:r>
+              <a:rPr lang="ko-KR" altLang="ko-KR" sz="1100" dirty="0" err="1"/>
+              <a:t>기획·개선</a:t>
+            </a:r>
+            <a:r>
+              <a:rPr lang="ko-KR" altLang="ko-KR" sz="1100" dirty="0"/>
+              <a:t> 등 핵심 업무에 집중하기 어려움</a:t>
             </a:r>
           </a:p>
         </p:txBody>
@@ -4589,9 +4575,11 @@
               <a:rPr lang="ko-KR" altLang="en-US" sz="1100" dirty="0">
                 <a:sym typeface="Wingdings" pitchFamily="2" charset="2"/>
               </a:rPr>
-              <a:t> 자동 답변</a:t>
-            </a:r>
-            <a:endParaRPr lang="ko-KR" altLang="en-US" sz="1100" dirty="0"/>
+              <a:t> 자동 답변 제공</a:t>
+            </a:r>
+            <a:endParaRPr lang="en-US" altLang="ko-KR" sz="1100" dirty="0">
+              <a:sym typeface="Wingdings" pitchFamily="2" charset="2"/>
+            </a:endParaRPr>
           </a:p>
           <a:p>
             <a:pPr>
@@ -4603,90 +4591,19 @@
             <a:pPr>
               <a:defRPr/>
             </a:pPr>
-            <a:r>
-              <a:rPr lang="en-US" altLang="ko-KR" sz="1100" b="1" dirty="0"/>
-              <a:t>② </a:t>
-            </a:r>
-            <a:r>
-              <a:rPr lang="ko-KR" altLang="en-US" sz="1100" b="1" dirty="0"/>
-              <a:t>개선내용</a:t>
-            </a:r>
+            <a:endParaRPr lang="ko-KR" altLang="en-US" sz="1100" dirty="0"/>
           </a:p>
           <a:p>
             <a:pPr>
               <a:defRPr/>
             </a:pPr>
             <a:r>
-              <a:rPr lang="en-US" altLang="ko-KR" sz="1100" dirty="0"/>
-              <a:t>-</a:t>
-            </a:r>
-            <a:r>
-              <a:rPr lang="ko-KR" altLang="en-US" sz="1100" dirty="0"/>
-              <a:t> </a:t>
-            </a:r>
-            <a:r>
-              <a:rPr lang="en-US" altLang="ko-KR" sz="1100" dirty="0"/>
-              <a:t>P-GPT </a:t>
-            </a:r>
-            <a:r>
-              <a:rPr lang="ko-KR" altLang="en-US" sz="1100" dirty="0"/>
-              <a:t>내 </a:t>
-            </a:r>
-            <a:r>
-              <a:rPr lang="en-US" altLang="ko-KR" sz="1100" dirty="0"/>
-              <a:t>HR</a:t>
-            </a:r>
-            <a:r>
-              <a:rPr lang="ko-KR" altLang="en-US" sz="1100" dirty="0"/>
-              <a:t> </a:t>
-            </a:r>
-            <a:r>
-              <a:rPr lang="ko-KR" altLang="en-US" sz="1100" dirty="0" err="1"/>
-              <a:t>챗봇용</a:t>
-            </a:r>
-            <a:r>
-              <a:rPr lang="ko-KR" altLang="en-US" sz="1100" dirty="0"/>
-              <a:t> 에이전트 생성 → 정형화된 규정</a:t>
-            </a:r>
-            <a:r>
-              <a:rPr lang="en-US" altLang="ko-KR" sz="1100" dirty="0"/>
-              <a:t>/</a:t>
-            </a:r>
-            <a:r>
-              <a:rPr lang="ko-KR" altLang="en-US" sz="1100" dirty="0"/>
-              <a:t>지침</a:t>
-            </a:r>
-            <a:r>
-              <a:rPr lang="en-US" altLang="ko-KR" sz="1100" dirty="0"/>
-              <a:t>/</a:t>
-            </a:r>
-            <a:r>
-              <a:rPr lang="ko-KR" altLang="en-US" sz="1100" dirty="0"/>
-              <a:t>기준</a:t>
-            </a:r>
-            <a:r>
-              <a:rPr lang="en-US" altLang="ko-KR" sz="1100" dirty="0"/>
-              <a:t>/</a:t>
-            </a:r>
-            <a:r>
-              <a:rPr lang="ko-KR" altLang="en-US" sz="1100" dirty="0"/>
-              <a:t>절차서 </a:t>
-            </a:r>
-            <a:r>
-              <a:rPr lang="en-US" altLang="ko-KR" sz="1100" dirty="0"/>
-              <a:t>40</a:t>
-            </a:r>
-            <a:r>
-              <a:rPr lang="ko-KR" altLang="en-US" sz="1100" dirty="0"/>
-              <a:t>여개 업로드 후 </a:t>
-            </a:r>
-            <a:r>
-              <a:rPr lang="en-US" altLang="ko-KR" sz="1100" dirty="0"/>
-              <a:t>RAG </a:t>
-            </a:r>
-            <a:r>
-              <a:rPr lang="ko-KR" altLang="en-US" sz="1100" dirty="0"/>
-              <a:t>구축</a:t>
+              <a:rPr lang="en-US" altLang="ko-KR" sz="1100" b="1" dirty="0"/>
+              <a:t>② </a:t>
+            </a:r>
+            <a:r>
+              <a:rPr lang="ko-KR" altLang="en-US" sz="1100" b="1" dirty="0"/>
+              <a:t>주요 개발 내용</a:t>
             </a:r>
           </a:p>
           <a:p>
@@ -4694,28 +4611,20 @@
               <a:defRPr/>
             </a:pPr>
             <a:r>
-              <a:rPr lang="en-US" altLang="ko-KR" sz="1100" dirty="0"/>
-              <a:t>-</a:t>
-            </a:r>
-            <a:r>
-              <a:rPr lang="ko-KR" altLang="en-US" sz="1100" dirty="0"/>
-              <a:t> 사규 </a:t>
-            </a:r>
-            <a:r>
-              <a:rPr lang="ko-KR" altLang="en-US" sz="1100" dirty="0" err="1"/>
-              <a:t>外</a:t>
-            </a:r>
-            <a:r>
-              <a:rPr lang="ko-KR" altLang="en-US" sz="1100" dirty="0"/>
-              <a:t> 복리후생 현황</a:t>
-            </a:r>
-            <a:r>
-              <a:rPr lang="en-US" altLang="ko-KR" sz="1100" dirty="0"/>
-              <a:t>, </a:t>
-            </a:r>
-            <a:r>
-              <a:rPr lang="ko-KR" altLang="en-US" sz="1100" dirty="0"/>
-              <a:t>승진 기준 등 현행 제도 운영 기준 별도 추가 구축</a:t>
+              <a:rPr lang="ko-KR" altLang="ko-KR" sz="1100" dirty="0" err="1"/>
+              <a:t>사규·제도</a:t>
+            </a:r>
+            <a:r>
+              <a:rPr lang="ko-KR" altLang="ko-KR" sz="1100" dirty="0"/>
+              <a:t> 문서를 기반으로 RAG 기술을 적용한 P-GPT HR </a:t>
+            </a:r>
+            <a:r>
+              <a:rPr lang="ko-KR" altLang="ko-KR" sz="1100" dirty="0" err="1"/>
+              <a:t>챗봇을</a:t>
+            </a:r>
+            <a:r>
+              <a:rPr lang="ko-KR" altLang="ko-KR" sz="1100" dirty="0"/>
+              <a:t> 구축하여 직원 문의를 자동 응대함</a:t>
             </a:r>
           </a:p>
           <a:p>
@@ -4728,23 +4637,27 @@
             </a:r>
             <a:r>
               <a:rPr lang="ko-KR" altLang="en-US" sz="1100" dirty="0"/>
-              <a:t> 기타 주요 </a:t>
-            </a:r>
-            <a:r>
-              <a:rPr lang="en-US" altLang="ko-KR" sz="1100" dirty="0"/>
-              <a:t>FAQ </a:t>
-            </a:r>
-            <a:r>
-              <a:rPr lang="ko-KR" altLang="en-US" sz="1100" dirty="0"/>
-              <a:t>목록을 별도로 작성</a:t>
-            </a:r>
-            <a:r>
-              <a:rPr lang="en-US" altLang="ko-KR" sz="1100" dirty="0"/>
-              <a:t>, </a:t>
-            </a:r>
-            <a:r>
-              <a:rPr lang="ko-KR" altLang="en-US" sz="1100" dirty="0"/>
-              <a:t>자주 묻는 질문에 대해서는 정형화된 공식 답변 등록</a:t>
+              <a:t> </a:t>
+            </a:r>
+            <a:r>
+              <a:rPr lang="ko-KR" altLang="ko-KR" sz="1100" dirty="0"/>
+              <a:t>P-GPT 기반 HR </a:t>
+            </a:r>
+            <a:r>
+              <a:rPr lang="ko-KR" altLang="ko-KR" sz="1100" dirty="0" err="1"/>
+              <a:t>챗봇</a:t>
+            </a:r>
+            <a:r>
+              <a:rPr lang="ko-KR" altLang="ko-KR" sz="1100" dirty="0"/>
+              <a:t> 에이전트를 구축하고 </a:t>
+            </a:r>
+            <a:r>
+              <a:rPr lang="ko-KR" altLang="ko-KR" sz="1100" dirty="0" err="1"/>
+              <a:t>사규·지침·절차서</a:t>
+            </a:r>
+            <a:r>
+              <a:rPr lang="ko-KR" altLang="ko-KR" sz="1100" dirty="0"/>
+              <a:t> 등 40여 개 문서를 활용한 RAG 시스템을 구현</a:t>
             </a:r>
           </a:p>
           <a:p>
@@ -4757,23 +4670,53 @@
             </a:r>
             <a:r>
               <a:rPr lang="ko-KR" altLang="en-US" sz="1100" dirty="0"/>
-              <a:t> 최종적으로 </a:t>
-            </a:r>
-            <a:r>
-              <a:rPr lang="ko-KR" altLang="en-US" sz="1100" dirty="0" err="1"/>
-              <a:t>챗봇으로</a:t>
+              <a:t> </a:t>
+            </a:r>
+            <a:r>
+              <a:rPr lang="ko-KR" altLang="ko-KR" sz="1100" dirty="0"/>
+              <a:t>복리후생, 승진 기준 등 현행 제도 운영 기준을 추가 데이터로 구축</a:t>
+            </a:r>
+          </a:p>
+          <a:p>
+            <a:pPr>
+              <a:defRPr/>
+            </a:pPr>
+            <a:r>
+              <a:rPr lang="en-US" altLang="ko-KR" sz="1100" dirty="0"/>
+              <a:t>-</a:t>
             </a:r>
             <a:r>
               <a:rPr lang="ko-KR" altLang="en-US" sz="1100" dirty="0"/>
-              <a:t> 불가한 답변은 </a:t>
-            </a:r>
+              <a:t> </a:t>
+            </a:r>
+            <a:r>
+              <a:rPr lang="ko-KR" altLang="ko-KR" sz="1100" dirty="0"/>
+              <a:t>자주 묻는 질문(FAQ)</a:t>
+            </a:r>
+            <a:r>
+              <a:rPr lang="ko-KR" altLang="ko-KR" sz="1100" dirty="0" err="1"/>
+              <a:t>에</a:t>
+            </a:r>
+            <a:r>
+              <a:rPr lang="ko-KR" altLang="ko-KR" sz="1100" dirty="0"/>
+              <a:t> 대한 표준화된 공식 답변 제공 체계 마련</a:t>
+            </a:r>
+          </a:p>
+          <a:p>
+            <a:pPr>
+              <a:defRPr/>
+            </a:pPr>
             <a:r>
               <a:rPr lang="en-US" altLang="ko-KR" sz="1100" dirty="0"/>
-              <a:t>HR</a:t>
+              <a:t>-</a:t>
             </a:r>
             <a:r>
               <a:rPr lang="ko-KR" altLang="en-US" sz="1100" dirty="0"/>
-              <a:t>담당자 직접 문의 안내 → 이후 답변 업데이트하여 추후에 반영</a:t>
+              <a:t> </a:t>
+            </a:r>
+            <a:r>
+              <a:rPr lang="ko-KR" altLang="ko-KR" sz="1100" dirty="0"/>
+              <a:t>답변 불가 문의는 HR 담당자에게 연결하고, 답변 내용을 지속적으로 데이터에 반영</a:t>
             </a:r>
             <a:br>
               <a:rPr lang="ko-KR" altLang="en-US" sz="1100" dirty="0"/>
@@ -4792,7 +4735,16 @@
               <a:rPr lang="ko-KR" altLang="en-US" sz="1100" b="1" dirty="0"/>
               <a:t>기대효과</a:t>
             </a:r>
-            <a:endParaRPr lang="en-US" altLang="ko-KR" sz="1100" dirty="0"/>
+            <a:endParaRPr lang="en-US" altLang="ko-KR" sz="1100" b="1" dirty="0"/>
+          </a:p>
+          <a:p>
+            <a:pPr>
+              <a:defRPr/>
+            </a:pPr>
+            <a:r>
+              <a:rPr lang="ko-KR" altLang="ko-KR" sz="1100" dirty="0"/>
+              <a:t>반복 문의를 자동화하여 HR 업무 효율성을 높이고 직원의 정보 접근성과 서비스 만족도를 향상시킴</a:t>
+            </a:r>
           </a:p>
           <a:p>
             <a:pPr marL="171450" indent="-171450">
@@ -4801,23 +4753,15 @@
             </a:pPr>
             <a:r>
               <a:rPr lang="ko-KR" altLang="en-US" sz="1100" dirty="0"/>
-              <a:t>반복되는 질문 응대는 </a:t>
-            </a:r>
-            <a:r>
-              <a:rPr lang="ko-KR" altLang="en-US" sz="1100" dirty="0" err="1"/>
-              <a:t>챗봇에게</a:t>
+              <a:t>반복 문의를 자동화하여 </a:t>
+            </a:r>
+            <a:r>
+              <a:rPr lang="en-US" altLang="ko-KR" sz="1100" dirty="0"/>
+              <a:t>HR </a:t>
             </a:r>
             <a:r>
               <a:rPr lang="ko-KR" altLang="en-US" sz="1100" dirty="0"/>
-              <a:t> 맡기고 제도 기획</a:t>
-            </a:r>
-            <a:r>
-              <a:rPr lang="en-US" altLang="ko-KR" sz="1100" dirty="0"/>
-              <a:t>/</a:t>
-            </a:r>
-            <a:r>
-              <a:rPr lang="ko-KR" altLang="en-US" sz="1100" dirty="0"/>
-              <a:t>개선 등 고부가가치 업무에 집중 가능</a:t>
+              <a:t>담당자가 제도 기획 및 개선 등 고부가가치 업무에 집중 가능</a:t>
             </a:r>
           </a:p>
           <a:p>
@@ -4827,7 +4771,7 @@
             </a:pPr>
             <a:r>
               <a:rPr lang="ko-KR" altLang="en-US" sz="1100" dirty="0"/>
-              <a:t>직원 또한 </a:t>
+              <a:t>직원이 </a:t>
             </a:r>
             <a:r>
               <a:rPr lang="en-US" altLang="ko-KR" sz="1100" dirty="0"/>
@@ -4835,36 +4779,34 @@
             </a:r>
             <a:r>
               <a:rPr lang="ko-KR" altLang="en-US" sz="1100" dirty="0"/>
-              <a:t>시간 사용 가능한 </a:t>
-            </a:r>
-            <a:r>
-              <a:rPr lang="ko-KR" altLang="en-US" sz="1100" dirty="0" err="1"/>
-              <a:t>챗봇을</a:t>
+              <a:t>시간 언제든지 신속하게 </a:t>
+            </a:r>
+            <a:r>
+              <a:rPr lang="en-US" altLang="ko-KR" sz="1100" dirty="0"/>
+              <a:t>HR </a:t>
             </a:r>
             <a:r>
               <a:rPr lang="ko-KR" altLang="en-US" sz="1100" dirty="0"/>
-              <a:t> 통해 언제든 문의와 답변이 가능</a:t>
-            </a:r>
-            <a:r>
-              <a:rPr lang="en-US" altLang="ko-KR" sz="1100" dirty="0"/>
-              <a:t>(</a:t>
-            </a:r>
-            <a:r>
-              <a:rPr lang="ko-KR" altLang="en-US" sz="1100" dirty="0"/>
-              <a:t>특히 교대직원</a:t>
-            </a:r>
-            <a:r>
-              <a:rPr lang="en-US" altLang="ko-KR" sz="1100" dirty="0"/>
-              <a:t>)</a:t>
+              <a:t>정보를 확인할 수 있어 사용자 편의성 향상</a:t>
             </a:r>
           </a:p>
           <a:p>
             <a:pPr marL="171450" indent="-171450">
               <a:buFontTx/>
               <a:buChar char="-"/>
-              <a:defRPr/>
             </a:pPr>
-            <a:endParaRPr lang="ko-KR" altLang="en-US" sz="1100" dirty="0"/>
+            <a:r>
+              <a:rPr lang="ko-KR" altLang="en-US" sz="1100" dirty="0"/>
+              <a:t>문의 응답 품질과 일관성을 높여 </a:t>
+            </a:r>
+            <a:r>
+              <a:rPr lang="en-US" altLang="ko-KR" sz="1100" dirty="0"/>
+              <a:t>HR </a:t>
+            </a:r>
+            <a:r>
+              <a:rPr lang="ko-KR" altLang="en-US" sz="1100" dirty="0"/>
+              <a:t>서비스 만족도 및 업무 효율성 제고</a:t>
+            </a:r>
           </a:p>
         </p:txBody>
       </p:sp>
